--- a/docs/presentation.pptx
+++ b/docs/presentation.pptx
@@ -3605,7 +3605,7 @@
                 <a:ea typeface="Calibri" pitchFamily="34" charset="-122"/>
                 <a:cs typeface="Calibri" pitchFamily="34" charset="-120"/>
               </a:rPr>
-              <a:t>Очередь честная: пока считается один запрос, второй видит статус «В очереди»</a:t>
+              <a:t>Параллельные запросы разводит сама llama.cpp: число слотов задаётся её параметром -np</a:t>
             </a:r>
             <a:endParaRPr lang="en-US" sz="1350" dirty="0"/>
           </a:p>
